--- a/slides/03-EDA.pptx
+++ b/slides/03-EDA.pptx
@@ -5,24 +5,25 @@
     <p:sldMasterId id="2147483660" r:id="rId1"/>
   </p:sldMasterIdLst>
   <p:notesMasterIdLst>
-    <p:notesMasterId r:id="rId17"/>
+    <p:notesMasterId r:id="rId18"/>
   </p:notesMasterIdLst>
   <p:sldIdLst>
     <p:sldId id="256" r:id="rId2"/>
     <p:sldId id="257" r:id="rId3"/>
-    <p:sldId id="258" r:id="rId4"/>
-    <p:sldId id="259" r:id="rId5"/>
-    <p:sldId id="260" r:id="rId6"/>
-    <p:sldId id="261" r:id="rId7"/>
-    <p:sldId id="266" r:id="rId8"/>
-    <p:sldId id="262" r:id="rId9"/>
-    <p:sldId id="267" r:id="rId10"/>
-    <p:sldId id="268" r:id="rId11"/>
-    <p:sldId id="263" r:id="rId12"/>
-    <p:sldId id="269" r:id="rId13"/>
-    <p:sldId id="264" r:id="rId14"/>
-    <p:sldId id="265" r:id="rId15"/>
-    <p:sldId id="270" r:id="rId16"/>
+    <p:sldId id="271" r:id="rId4"/>
+    <p:sldId id="258" r:id="rId5"/>
+    <p:sldId id="259" r:id="rId6"/>
+    <p:sldId id="260" r:id="rId7"/>
+    <p:sldId id="261" r:id="rId8"/>
+    <p:sldId id="266" r:id="rId9"/>
+    <p:sldId id="262" r:id="rId10"/>
+    <p:sldId id="267" r:id="rId11"/>
+    <p:sldId id="268" r:id="rId12"/>
+    <p:sldId id="263" r:id="rId13"/>
+    <p:sldId id="269" r:id="rId14"/>
+    <p:sldId id="264" r:id="rId15"/>
+    <p:sldId id="265" r:id="rId16"/>
+    <p:sldId id="270" r:id="rId17"/>
   </p:sldIdLst>
   <p:sldSz cx="12192000" cy="6858000"/>
   <p:notesSz cx="6858000" cy="9144000"/>
@@ -211,7 +212,7 @@
           <a:p>
             <a:fld id="{2CD22518-F7FE-2E40-9C60-793856882CE6}" type="datetimeFigureOut">
               <a:rPr lang="en-US" smtClean="0"/>
-              <a:t>12/4/25</a:t>
+              <a:t>2/5/26</a:t>
             </a:fld>
             <a:endParaRPr lang="en-US"/>
           </a:p>
@@ -558,7 +559,7 @@
           <a:p>
             <a:fld id="{362CD335-F0CB-D347-B8A5-7AB70F34C34F}" type="slidenum">
               <a:rPr lang="en-US" smtClean="0"/>
-              <a:t>4</a:t>
+              <a:t>5</a:t>
             </a:fld>
             <a:endParaRPr lang="en-US"/>
           </a:p>
@@ -669,7 +670,7 @@
           <a:p>
             <a:fld id="{362CD335-F0CB-D347-B8A5-7AB70F34C34F}" type="slidenum">
               <a:rPr lang="en-US" smtClean="0"/>
-              <a:t>13</a:t>
+              <a:t>14</a:t>
             </a:fld>
             <a:endParaRPr lang="en-US"/>
           </a:p>
@@ -780,7 +781,7 @@
           <a:p>
             <a:fld id="{362CD335-F0CB-D347-B8A5-7AB70F34C34F}" type="slidenum">
               <a:rPr lang="en-US" smtClean="0"/>
-              <a:t>14</a:t>
+              <a:t>15</a:t>
             </a:fld>
             <a:endParaRPr lang="en-US"/>
           </a:p>
@@ -891,7 +892,7 @@
           <a:p>
             <a:fld id="{362CD335-F0CB-D347-B8A5-7AB70F34C34F}" type="slidenum">
               <a:rPr lang="en-US" smtClean="0"/>
-              <a:t>15</a:t>
+              <a:t>16</a:t>
             </a:fld>
             <a:endParaRPr lang="en-US"/>
           </a:p>
@@ -1005,7 +1006,7 @@
           <a:p>
             <a:fld id="{362CD335-F0CB-D347-B8A5-7AB70F34C34F}" type="slidenum">
               <a:rPr lang="en-US" smtClean="0"/>
-              <a:t>5</a:t>
+              <a:t>6</a:t>
             </a:fld>
             <a:endParaRPr lang="en-US"/>
           </a:p>
@@ -1119,7 +1120,7 @@
           <a:p>
             <a:fld id="{362CD335-F0CB-D347-B8A5-7AB70F34C34F}" type="slidenum">
               <a:rPr lang="en-US" smtClean="0"/>
-              <a:t>6</a:t>
+              <a:t>7</a:t>
             </a:fld>
             <a:endParaRPr lang="en-US"/>
           </a:p>
@@ -1242,7 +1243,7 @@
           <a:p>
             <a:fld id="{362CD335-F0CB-D347-B8A5-7AB70F34C34F}" type="slidenum">
               <a:rPr lang="en-US" smtClean="0"/>
-              <a:t>7</a:t>
+              <a:t>8</a:t>
             </a:fld>
             <a:endParaRPr lang="en-US"/>
           </a:p>
@@ -1353,7 +1354,7 @@
           <a:p>
             <a:fld id="{362CD335-F0CB-D347-B8A5-7AB70F34C34F}" type="slidenum">
               <a:rPr lang="en-US" smtClean="0"/>
-              <a:t>8</a:t>
+              <a:t>9</a:t>
             </a:fld>
             <a:endParaRPr lang="en-US"/>
           </a:p>
@@ -1464,7 +1465,7 @@
           <a:p>
             <a:fld id="{362CD335-F0CB-D347-B8A5-7AB70F34C34F}" type="slidenum">
               <a:rPr lang="en-US" smtClean="0"/>
-              <a:t>9</a:t>
+              <a:t>10</a:t>
             </a:fld>
             <a:endParaRPr lang="en-US"/>
           </a:p>
@@ -1575,7 +1576,7 @@
           <a:p>
             <a:fld id="{362CD335-F0CB-D347-B8A5-7AB70F34C34F}" type="slidenum">
               <a:rPr lang="en-US" smtClean="0"/>
-              <a:t>10</a:t>
+              <a:t>11</a:t>
             </a:fld>
             <a:endParaRPr lang="en-US"/>
           </a:p>
@@ -1686,7 +1687,7 @@
           <a:p>
             <a:fld id="{362CD335-F0CB-D347-B8A5-7AB70F34C34F}" type="slidenum">
               <a:rPr lang="en-US" smtClean="0"/>
-              <a:t>11</a:t>
+              <a:t>12</a:t>
             </a:fld>
             <a:endParaRPr lang="en-US"/>
           </a:p>
@@ -1797,7 +1798,7 @@
           <a:p>
             <a:fld id="{362CD335-F0CB-D347-B8A5-7AB70F34C34F}" type="slidenum">
               <a:rPr lang="en-US" smtClean="0"/>
-              <a:t>12</a:t>
+              <a:t>13</a:t>
             </a:fld>
             <a:endParaRPr lang="en-US"/>
           </a:p>
@@ -2069,7 +2070,7 @@
             <a:fld id="{B61BEF0D-F0BB-DE4B-95CE-6DB70DBA9567}" type="datetimeFigureOut">
               <a:rPr lang="en-US" smtClean="0"/>
               <a:pPr/>
-              <a:t>12/4/25</a:t>
+              <a:t>2/5/26</a:t>
             </a:fld>
             <a:endParaRPr lang="en-US" dirty="0"/>
           </a:p>
@@ -2333,7 +2334,7 @@
             <a:fld id="{B61BEF0D-F0BB-DE4B-95CE-6DB70DBA9567}" type="datetimeFigureOut">
               <a:rPr lang="en-US" smtClean="0"/>
               <a:pPr/>
-              <a:t>12/4/25</a:t>
+              <a:t>2/5/26</a:t>
             </a:fld>
             <a:endParaRPr lang="en-US" dirty="0"/>
           </a:p>
@@ -2570,7 +2571,7 @@
             <a:fld id="{B61BEF0D-F0BB-DE4B-95CE-6DB70DBA9567}" type="datetimeFigureOut">
               <a:rPr lang="en-US" smtClean="0"/>
               <a:pPr/>
-              <a:t>12/4/25</a:t>
+              <a:t>2/5/26</a:t>
             </a:fld>
             <a:endParaRPr lang="en-US" dirty="0"/>
           </a:p>
@@ -2819,7 +2820,7 @@
             <a:fld id="{B61BEF0D-F0BB-DE4B-95CE-6DB70DBA9567}" type="datetimeFigureOut">
               <a:rPr lang="en-US" smtClean="0"/>
               <a:pPr/>
-              <a:t>12/4/25</a:t>
+              <a:t>2/5/26</a:t>
             </a:fld>
             <a:endParaRPr lang="en-US" dirty="0"/>
           </a:p>
@@ -3128,7 +3129,7 @@
             <a:fld id="{B61BEF0D-F0BB-DE4B-95CE-6DB70DBA9567}" type="datetimeFigureOut">
               <a:rPr lang="en-US" smtClean="0"/>
               <a:pPr/>
-              <a:t>12/4/25</a:t>
+              <a:t>2/5/26</a:t>
             </a:fld>
             <a:endParaRPr lang="en-US" dirty="0"/>
           </a:p>
@@ -3432,7 +3433,7 @@
             <a:fld id="{B61BEF0D-F0BB-DE4B-95CE-6DB70DBA9567}" type="datetimeFigureOut">
               <a:rPr lang="en-US" smtClean="0"/>
               <a:pPr/>
-              <a:t>12/4/25</a:t>
+              <a:t>2/5/26</a:t>
             </a:fld>
             <a:endParaRPr lang="en-US" dirty="0"/>
           </a:p>
@@ -3856,7 +3857,7 @@
             <a:fld id="{B61BEF0D-F0BB-DE4B-95CE-6DB70DBA9567}" type="datetimeFigureOut">
               <a:rPr lang="en-US" smtClean="0"/>
               <a:pPr/>
-              <a:t>12/4/25</a:t>
+              <a:t>2/5/26</a:t>
             </a:fld>
             <a:endParaRPr lang="en-US" dirty="0"/>
           </a:p>
@@ -3953,7 +3954,7 @@
             <a:fld id="{B61BEF0D-F0BB-DE4B-95CE-6DB70DBA9567}" type="datetimeFigureOut">
               <a:rPr lang="en-US" smtClean="0"/>
               <a:pPr/>
-              <a:t>12/4/25</a:t>
+              <a:t>2/5/26</a:t>
             </a:fld>
             <a:endParaRPr lang="en-US" dirty="0"/>
           </a:p>
@@ -4117,7 +4118,7 @@
             <a:fld id="{B61BEF0D-F0BB-DE4B-95CE-6DB70DBA9567}" type="datetimeFigureOut">
               <a:rPr lang="en-US" smtClean="0"/>
               <a:pPr/>
-              <a:t>12/4/25</a:t>
+              <a:t>2/5/26</a:t>
             </a:fld>
             <a:endParaRPr lang="en-US" dirty="0"/>
           </a:p>
@@ -4497,7 +4498,7 @@
             <a:fld id="{B61BEF0D-F0BB-DE4B-95CE-6DB70DBA9567}" type="datetimeFigureOut">
               <a:rPr lang="en-US" smtClean="0"/>
               <a:pPr/>
-              <a:t>12/4/25</a:t>
+              <a:t>2/5/26</a:t>
             </a:fld>
             <a:endParaRPr lang="en-US" dirty="0"/>
           </a:p>
@@ -4788,7 +4789,7 @@
             <a:fld id="{B61BEF0D-F0BB-DE4B-95CE-6DB70DBA9567}" type="datetimeFigureOut">
               <a:rPr lang="en-US" smtClean="0"/>
               <a:pPr/>
-              <a:t>12/4/25</a:t>
+              <a:t>2/5/26</a:t>
             </a:fld>
             <a:endParaRPr lang="en-US" dirty="0"/>
           </a:p>
@@ -5001,7 +5002,7 @@
             <a:fld id="{B61BEF0D-F0BB-DE4B-95CE-6DB70DBA9567}" type="datetimeFigureOut">
               <a:rPr lang="en-US" smtClean="0"/>
               <a:pPr/>
-              <a:t>12/4/25</a:t>
+              <a:t>2/5/26</a:t>
             </a:fld>
             <a:endParaRPr lang="en-US" dirty="0"/>
           </a:p>
@@ -5710,6 +5711,190 @@
         <p:cNvPr id="1" name="">
           <a:extLst>
             <a:ext uri="{FF2B5EF4-FFF2-40B4-BE49-F238E27FC236}">
+              <a16:creationId xmlns:a16="http://schemas.microsoft.com/office/drawing/2014/main" id="{C4FB1963-FD58-5F75-BF90-83C5D7E5A484}"/>
+            </a:ext>
+          </a:extLst>
+        </p:cNvPr>
+        <p:cNvGrpSpPr/>
+        <p:nvPr/>
+      </p:nvGrpSpPr>
+      <p:grpSpPr>
+        <a:xfrm>
+          <a:off x="0" y="0"/>
+          <a:ext cx="0" cy="0"/>
+          <a:chOff x="0" y="0"/>
+          <a:chExt cx="0" cy="0"/>
+        </a:xfrm>
+      </p:grpSpPr>
+      <p:sp>
+        <p:nvSpPr>
+          <p:cNvPr id="2" name="Title 1">
+            <a:extLst>
+              <a:ext uri="{FF2B5EF4-FFF2-40B4-BE49-F238E27FC236}">
+                <a16:creationId xmlns:a16="http://schemas.microsoft.com/office/drawing/2014/main" id="{AAB68074-CA91-0DF9-D7E7-5C6EC2208D12}"/>
+              </a:ext>
+            </a:extLst>
+          </p:cNvPr>
+          <p:cNvSpPr>
+            <a:spLocks noGrp="1"/>
+          </p:cNvSpPr>
+          <p:nvPr>
+            <p:ph type="title"/>
+          </p:nvPr>
+        </p:nvSpPr>
+        <p:spPr/>
+        <p:txBody>
+          <a:bodyPr/>
+          <a:lstStyle/>
+          <a:p>
+            <a:r>
+              <a:rPr lang="en-US" dirty="0"/>
+              <a:t>EDA Techniques </a:t>
+            </a:r>
+          </a:p>
+        </p:txBody>
+      </p:sp>
+      <p:sp>
+        <p:nvSpPr>
+          <p:cNvPr id="3" name="Content Placeholder 2">
+            <a:extLst>
+              <a:ext uri="{FF2B5EF4-FFF2-40B4-BE49-F238E27FC236}">
+                <a16:creationId xmlns:a16="http://schemas.microsoft.com/office/drawing/2014/main" id="{B5BB12DE-FC0E-871E-5C12-C25B8A95D744}"/>
+              </a:ext>
+            </a:extLst>
+          </p:cNvPr>
+          <p:cNvSpPr>
+            <a:spLocks noGrp="1"/>
+          </p:cNvSpPr>
+          <p:nvPr>
+            <p:ph idx="1"/>
+          </p:nvPr>
+        </p:nvSpPr>
+        <p:spPr/>
+        <p:txBody>
+          <a:bodyPr anchor="t">
+            <a:normAutofit/>
+          </a:bodyPr>
+          <a:lstStyle/>
+          <a:p>
+            <a:r>
+              <a:rPr lang="en-US" sz="2400" dirty="0"/>
+              <a:t>Distributions (quantitative variables)</a:t>
+            </a:r>
+          </a:p>
+        </p:txBody>
+      </p:sp>
+      <p:pic>
+        <p:nvPicPr>
+          <p:cNvPr id="6" name="Picture 5" descr="A graph of a number of numbers&#10;&#10;AI-generated content may be incorrect.">
+            <a:extLst>
+              <a:ext uri="{FF2B5EF4-FFF2-40B4-BE49-F238E27FC236}">
+                <a16:creationId xmlns:a16="http://schemas.microsoft.com/office/drawing/2014/main" id="{89C7B987-2C52-91F6-FA52-A9004B4BAC64}"/>
+              </a:ext>
+            </a:extLst>
+          </p:cNvPr>
+          <p:cNvPicPr>
+            <a:picLocks noChangeAspect="1"/>
+          </p:cNvPicPr>
+          <p:nvPr/>
+        </p:nvPicPr>
+        <p:blipFill>
+          <a:blip r:embed="rId3"/>
+          <a:stretch>
+            <a:fillRect/>
+          </a:stretch>
+        </p:blipFill>
+        <p:spPr>
+          <a:xfrm>
+            <a:off x="581192" y="2884370"/>
+            <a:ext cx="3507453" cy="3678303"/>
+          </a:xfrm>
+          <a:prstGeom prst="rect">
+            <a:avLst/>
+          </a:prstGeom>
+        </p:spPr>
+      </p:pic>
+      <p:pic>
+        <p:nvPicPr>
+          <p:cNvPr id="10" name="Picture 9" descr="A graph with numbers and a graph&#10;&#10;AI-generated content may be incorrect.">
+            <a:extLst>
+              <a:ext uri="{FF2B5EF4-FFF2-40B4-BE49-F238E27FC236}">
+                <a16:creationId xmlns:a16="http://schemas.microsoft.com/office/drawing/2014/main" id="{DE4E35FF-B14A-D33E-20A6-D8A52F1B827C}"/>
+              </a:ext>
+            </a:extLst>
+          </p:cNvPr>
+          <p:cNvPicPr>
+            <a:picLocks noChangeAspect="1"/>
+          </p:cNvPicPr>
+          <p:nvPr/>
+        </p:nvPicPr>
+        <p:blipFill>
+          <a:blip r:embed="rId4"/>
+          <a:stretch>
+            <a:fillRect/>
+          </a:stretch>
+        </p:blipFill>
+        <p:spPr>
+          <a:xfrm>
+            <a:off x="4269388" y="2884369"/>
+            <a:ext cx="3507453" cy="3678303"/>
+          </a:xfrm>
+          <a:prstGeom prst="rect">
+            <a:avLst/>
+          </a:prstGeom>
+        </p:spPr>
+      </p:pic>
+      <p:pic>
+        <p:nvPicPr>
+          <p:cNvPr id="12" name="Picture 11" descr="Graph of a graph with numbers and text&#10;&#10;AI-generated content may be incorrect.">
+            <a:extLst>
+              <a:ext uri="{FF2B5EF4-FFF2-40B4-BE49-F238E27FC236}">
+                <a16:creationId xmlns:a16="http://schemas.microsoft.com/office/drawing/2014/main" id="{917530C9-C7D8-51CD-9635-0AA11E1ED704}"/>
+              </a:ext>
+            </a:extLst>
+          </p:cNvPr>
+          <p:cNvPicPr>
+            <a:picLocks noChangeAspect="1"/>
+          </p:cNvPicPr>
+          <p:nvPr/>
+        </p:nvPicPr>
+        <p:blipFill>
+          <a:blip r:embed="rId5"/>
+          <a:stretch>
+            <a:fillRect/>
+          </a:stretch>
+        </p:blipFill>
+        <p:spPr>
+          <a:xfrm>
+            <a:off x="7940097" y="2884368"/>
+            <a:ext cx="3507453" cy="3678303"/>
+          </a:xfrm>
+          <a:prstGeom prst="rect">
+            <a:avLst/>
+          </a:prstGeom>
+        </p:spPr>
+      </p:pic>
+    </p:spTree>
+    <p:extLst>
+      <p:ext uri="{BB962C8B-B14F-4D97-AF65-F5344CB8AC3E}">
+        <p14:creationId xmlns:p14="http://schemas.microsoft.com/office/powerpoint/2010/main" val="2169788912"/>
+      </p:ext>
+    </p:extLst>
+  </p:cSld>
+  <p:clrMapOvr>
+    <a:masterClrMapping/>
+  </p:clrMapOvr>
+</p:sld>
+</file>
+
+<file path=ppt/slides/slide11.xml><?xml version="1.0" encoding="utf-8"?>
+<p:sld xmlns:a="http://schemas.openxmlformats.org/drawingml/2006/main" xmlns:r="http://schemas.openxmlformats.org/officeDocument/2006/relationships" xmlns:p="http://schemas.openxmlformats.org/presentationml/2006/main">
+  <p:cSld>
+    <p:spTree>
+      <p:nvGrpSpPr>
+        <p:cNvPr id="1" name="">
+          <a:extLst>
+            <a:ext uri="{FF2B5EF4-FFF2-40B4-BE49-F238E27FC236}">
               <a16:creationId xmlns:a16="http://schemas.microsoft.com/office/drawing/2014/main" id="{324DEA2E-18D5-1511-D177-8E4FFCBB1EE1}"/>
             </a:ext>
           </a:extLst>
@@ -5856,7 +6041,7 @@
 </p:sld>
 </file>
 
-<file path=ppt/slides/slide11.xml><?xml version="1.0" encoding="utf-8"?>
+<file path=ppt/slides/slide12.xml><?xml version="1.0" encoding="utf-8"?>
 <p:sld xmlns:a="http://schemas.openxmlformats.org/drawingml/2006/main" xmlns:r="http://schemas.openxmlformats.org/officeDocument/2006/relationships" xmlns:p="http://schemas.openxmlformats.org/presentationml/2006/main">
   <p:cSld>
     <p:spTree>
@@ -5989,7 +6174,7 @@
 </p:sld>
 </file>
 
-<file path=ppt/slides/slide12.xml><?xml version="1.0" encoding="utf-8"?>
+<file path=ppt/slides/slide13.xml><?xml version="1.0" encoding="utf-8"?>
 <p:sld xmlns:a="http://schemas.openxmlformats.org/drawingml/2006/main" xmlns:r="http://schemas.openxmlformats.org/officeDocument/2006/relationships" xmlns:p="http://schemas.openxmlformats.org/presentationml/2006/main">
   <p:cSld>
     <p:spTree>
@@ -6127,7 +6312,7 @@
 </p:sld>
 </file>
 
-<file path=ppt/slides/slide13.xml><?xml version="1.0" encoding="utf-8"?>
+<file path=ppt/slides/slide14.xml><?xml version="1.0" encoding="utf-8"?>
 <p:sld xmlns:a="http://schemas.openxmlformats.org/drawingml/2006/main" xmlns:r="http://schemas.openxmlformats.org/officeDocument/2006/relationships" xmlns:p="http://schemas.openxmlformats.org/presentationml/2006/main">
   <p:cSld>
     <p:spTree>
@@ -6251,7 +6436,7 @@
 </p:sld>
 </file>
 
-<file path=ppt/slides/slide14.xml><?xml version="1.0" encoding="utf-8"?>
+<file path=ppt/slides/slide15.xml><?xml version="1.0" encoding="utf-8"?>
 <p:sld xmlns:a="http://schemas.openxmlformats.org/drawingml/2006/main" xmlns:r="http://schemas.openxmlformats.org/officeDocument/2006/relationships" xmlns:p="http://schemas.openxmlformats.org/presentationml/2006/main">
   <p:cSld>
     <p:spTree>
@@ -6375,7 +6560,7 @@
 </p:sld>
 </file>
 
-<file path=ppt/slides/slide15.xml><?xml version="1.0" encoding="utf-8"?>
+<file path=ppt/slides/slide16.xml><?xml version="1.0" encoding="utf-8"?>
 <p:sld xmlns:a="http://schemas.openxmlformats.org/drawingml/2006/main" xmlns:r="http://schemas.openxmlformats.org/officeDocument/2006/relationships" xmlns:p="http://schemas.openxmlformats.org/presentationml/2006/main">
   <p:cSld>
     <p:spTree>
@@ -6612,6 +6797,12 @@
           <a:p>
             <a:r>
               <a:rPr lang="en-US" sz="2400" dirty="0"/>
+              <a:t>HW notes </a:t>
+            </a:r>
+          </a:p>
+          <a:p>
+            <a:r>
+              <a:rPr lang="en-US" sz="2400" dirty="0"/>
               <a:t>Motivation</a:t>
             </a:r>
           </a:p>
@@ -6649,6 +6840,157 @@
 </file>
 
 <file path=ppt/slides/slide3.xml><?xml version="1.0" encoding="utf-8"?>
+<p:sld xmlns:a="http://schemas.openxmlformats.org/drawingml/2006/main" xmlns:r="http://schemas.openxmlformats.org/officeDocument/2006/relationships" xmlns:p="http://schemas.openxmlformats.org/presentationml/2006/main">
+  <p:cSld>
+    <p:spTree>
+      <p:nvGrpSpPr>
+        <p:cNvPr id="1" name="">
+          <a:extLst>
+            <a:ext uri="{FF2B5EF4-FFF2-40B4-BE49-F238E27FC236}">
+              <a16:creationId xmlns:a16="http://schemas.microsoft.com/office/drawing/2014/main" id="{43789FD0-8459-B14F-24B9-E169E21D930E}"/>
+            </a:ext>
+          </a:extLst>
+        </p:cNvPr>
+        <p:cNvGrpSpPr/>
+        <p:nvPr/>
+      </p:nvGrpSpPr>
+      <p:grpSpPr>
+        <a:xfrm>
+          <a:off x="0" y="0"/>
+          <a:ext cx="0" cy="0"/>
+          <a:chOff x="0" y="0"/>
+          <a:chExt cx="0" cy="0"/>
+        </a:xfrm>
+      </p:grpSpPr>
+      <p:sp>
+        <p:nvSpPr>
+          <p:cNvPr id="2" name="Title 1">
+            <a:extLst>
+              <a:ext uri="{FF2B5EF4-FFF2-40B4-BE49-F238E27FC236}">
+                <a16:creationId xmlns:a16="http://schemas.microsoft.com/office/drawing/2014/main" id="{77320C89-B2AB-B9FD-FDA8-EFE17C143760}"/>
+              </a:ext>
+            </a:extLst>
+          </p:cNvPr>
+          <p:cNvSpPr>
+            <a:spLocks noGrp="1"/>
+          </p:cNvSpPr>
+          <p:nvPr>
+            <p:ph type="title"/>
+          </p:nvPr>
+        </p:nvSpPr>
+        <p:spPr/>
+        <p:txBody>
+          <a:bodyPr/>
+          <a:lstStyle/>
+          <a:p>
+            <a:r>
+              <a:rPr lang="en-US" dirty="0" err="1"/>
+              <a:t>Hw</a:t>
+            </a:r>
+            <a:r>
+              <a:rPr lang="en-US" dirty="0"/>
+              <a:t> notes</a:t>
+            </a:r>
+          </a:p>
+        </p:txBody>
+      </p:sp>
+      <p:sp>
+        <p:nvSpPr>
+          <p:cNvPr id="3" name="Content Placeholder 2">
+            <a:extLst>
+              <a:ext uri="{FF2B5EF4-FFF2-40B4-BE49-F238E27FC236}">
+                <a16:creationId xmlns:a16="http://schemas.microsoft.com/office/drawing/2014/main" id="{D3101807-C8B0-35D1-AD22-D024A3810B51}"/>
+              </a:ext>
+            </a:extLst>
+          </p:cNvPr>
+          <p:cNvSpPr>
+            <a:spLocks noGrp="1"/>
+          </p:cNvSpPr>
+          <p:nvPr>
+            <p:ph idx="1"/>
+          </p:nvPr>
+        </p:nvSpPr>
+        <p:spPr/>
+        <p:txBody>
+          <a:bodyPr>
+            <a:normAutofit/>
+          </a:bodyPr>
+          <a:lstStyle/>
+          <a:p>
+            <a:r>
+              <a:rPr lang="en-US" sz="2400" dirty="0"/>
+              <a:t>Starter code for coding assignments will be on </a:t>
+            </a:r>
+            <a:r>
+              <a:rPr lang="en-US" sz="2400" dirty="0" err="1"/>
+              <a:t>Github</a:t>
+            </a:r>
+            <a:endParaRPr lang="en-US" sz="2400" dirty="0"/>
+          </a:p>
+          <a:p>
+            <a:pPr lvl="1"/>
+            <a:r>
+              <a:rPr lang="en-US" sz="2200" dirty="0"/>
+              <a:t>Ex. </a:t>
+            </a:r>
+            <a:r>
+              <a:rPr lang="en-US" sz="2200" dirty="0">
+                <a:hlinkClick r:id="rId2"/>
+              </a:rPr>
+              <a:t>https://github.com/amosca01/SDS-CSC-235-hw02</a:t>
+            </a:r>
+            <a:r>
+              <a:rPr lang="en-US" sz="2200" dirty="0"/>
+              <a:t> </a:t>
+            </a:r>
+          </a:p>
+          <a:p>
+            <a:pPr lvl="1"/>
+            <a:endParaRPr lang="en-US" sz="2200" dirty="0"/>
+          </a:p>
+          <a:p>
+            <a:r>
+              <a:rPr lang="en-US" sz="2400" b="1" dirty="0"/>
+              <a:t>Fork the starter code repo </a:t>
+            </a:r>
+            <a:r>
+              <a:rPr lang="en-US" sz="2400" dirty="0"/>
+              <a:t>and then work out of your fork</a:t>
+            </a:r>
+          </a:p>
+          <a:p>
+            <a:endParaRPr lang="en-US" sz="2400" dirty="0"/>
+          </a:p>
+          <a:p>
+            <a:r>
+              <a:rPr lang="en-US" sz="2400" dirty="0"/>
+              <a:t>You can submit on </a:t>
+            </a:r>
+            <a:r>
+              <a:rPr lang="en-US" sz="2400" dirty="0" err="1"/>
+              <a:t>Gradescope</a:t>
+            </a:r>
+            <a:r>
+              <a:rPr lang="en-US" sz="2400" dirty="0"/>
+              <a:t> by linking your repository once you’ve pushed your final submission</a:t>
+            </a:r>
+          </a:p>
+        </p:txBody>
+      </p:sp>
+    </p:spTree>
+    <p:extLst>
+      <p:ext uri="{BB962C8B-B14F-4D97-AF65-F5344CB8AC3E}">
+        <p14:creationId xmlns:p14="http://schemas.microsoft.com/office/powerpoint/2010/main" val="862274968"/>
+      </p:ext>
+    </p:extLst>
+  </p:cSld>
+  <p:clrMapOvr>
+    <a:masterClrMapping/>
+  </p:clrMapOvr>
+</p:sld>
+</file>
+
+<file path=ppt/slides/slide4.xml><?xml version="1.0" encoding="utf-8"?>
 <p:sld xmlns:a="http://schemas.openxmlformats.org/drawingml/2006/main" xmlns:r="http://schemas.openxmlformats.org/officeDocument/2006/relationships" xmlns:p="http://schemas.openxmlformats.org/presentationml/2006/main">
   <p:cSld>
     <p:spTree>
@@ -6761,7 +7103,7 @@
 </p:sld>
 </file>
 
-<file path=ppt/slides/slide4.xml><?xml version="1.0" encoding="utf-8"?>
+<file path=ppt/slides/slide5.xml><?xml version="1.0" encoding="utf-8"?>
 <p:sld xmlns:a="http://schemas.openxmlformats.org/drawingml/2006/main" xmlns:r="http://schemas.openxmlformats.org/officeDocument/2006/relationships" xmlns:p="http://schemas.openxmlformats.org/presentationml/2006/main">
   <p:cSld>
     <p:spTree>
@@ -6965,7 +7307,7 @@
 </p:sld>
 </file>
 
-<file path=ppt/slides/slide5.xml><?xml version="1.0" encoding="utf-8"?>
+<file path=ppt/slides/slide6.xml><?xml version="1.0" encoding="utf-8"?>
 <p:sld xmlns:a="http://schemas.openxmlformats.org/drawingml/2006/main" xmlns:r="http://schemas.openxmlformats.org/officeDocument/2006/relationships" xmlns:p="http://schemas.openxmlformats.org/presentationml/2006/main">
   <p:cSld>
     <p:spTree>
@@ -7121,7 +7463,7 @@
 </p:sld>
 </file>
 
-<file path=ppt/slides/slide6.xml><?xml version="1.0" encoding="utf-8"?>
+<file path=ppt/slides/slide7.xml><?xml version="1.0" encoding="utf-8"?>
 <p:sld xmlns:a="http://schemas.openxmlformats.org/drawingml/2006/main" xmlns:r="http://schemas.openxmlformats.org/officeDocument/2006/relationships" xmlns:p="http://schemas.openxmlformats.org/presentationml/2006/main">
   <p:cSld>
     <p:spTree>
@@ -7275,7 +7617,7 @@
 </p:sld>
 </file>
 
-<file path=ppt/slides/slide7.xml><?xml version="1.0" encoding="utf-8"?>
+<file path=ppt/slides/slide8.xml><?xml version="1.0" encoding="utf-8"?>
 <p:sld xmlns:a="http://schemas.openxmlformats.org/drawingml/2006/main" xmlns:r="http://schemas.openxmlformats.org/officeDocument/2006/relationships" xmlns:p="http://schemas.openxmlformats.org/presentationml/2006/main">
   <p:cSld>
     <p:spTree>
@@ -7531,7 +7873,7 @@
 </p:sld>
 </file>
 
-<file path=ppt/slides/slide8.xml><?xml version="1.0" encoding="utf-8"?>
+<file path=ppt/slides/slide9.xml><?xml version="1.0" encoding="utf-8"?>
 <p:sld xmlns:a="http://schemas.openxmlformats.org/drawingml/2006/main" xmlns:r="http://schemas.openxmlformats.org/officeDocument/2006/relationships" xmlns:p="http://schemas.openxmlformats.org/presentationml/2006/main">
   <p:cSld>
     <p:spTree>
@@ -7706,190 +8048,6 @@
     <p:extLst>
       <p:ext uri="{BB962C8B-B14F-4D97-AF65-F5344CB8AC3E}">
         <p14:creationId xmlns:p14="http://schemas.microsoft.com/office/powerpoint/2010/main" val="759211496"/>
-      </p:ext>
-    </p:extLst>
-  </p:cSld>
-  <p:clrMapOvr>
-    <a:masterClrMapping/>
-  </p:clrMapOvr>
-</p:sld>
-</file>
-
-<file path=ppt/slides/slide9.xml><?xml version="1.0" encoding="utf-8"?>
-<p:sld xmlns:a="http://schemas.openxmlformats.org/drawingml/2006/main" xmlns:r="http://schemas.openxmlformats.org/officeDocument/2006/relationships" xmlns:p="http://schemas.openxmlformats.org/presentationml/2006/main">
-  <p:cSld>
-    <p:spTree>
-      <p:nvGrpSpPr>
-        <p:cNvPr id="1" name="">
-          <a:extLst>
-            <a:ext uri="{FF2B5EF4-FFF2-40B4-BE49-F238E27FC236}">
-              <a16:creationId xmlns:a16="http://schemas.microsoft.com/office/drawing/2014/main" id="{C4FB1963-FD58-5F75-BF90-83C5D7E5A484}"/>
-            </a:ext>
-          </a:extLst>
-        </p:cNvPr>
-        <p:cNvGrpSpPr/>
-        <p:nvPr/>
-      </p:nvGrpSpPr>
-      <p:grpSpPr>
-        <a:xfrm>
-          <a:off x="0" y="0"/>
-          <a:ext cx="0" cy="0"/>
-          <a:chOff x="0" y="0"/>
-          <a:chExt cx="0" cy="0"/>
-        </a:xfrm>
-      </p:grpSpPr>
-      <p:sp>
-        <p:nvSpPr>
-          <p:cNvPr id="2" name="Title 1">
-            <a:extLst>
-              <a:ext uri="{FF2B5EF4-FFF2-40B4-BE49-F238E27FC236}">
-                <a16:creationId xmlns:a16="http://schemas.microsoft.com/office/drawing/2014/main" id="{AAB68074-CA91-0DF9-D7E7-5C6EC2208D12}"/>
-              </a:ext>
-            </a:extLst>
-          </p:cNvPr>
-          <p:cNvSpPr>
-            <a:spLocks noGrp="1"/>
-          </p:cNvSpPr>
-          <p:nvPr>
-            <p:ph type="title"/>
-          </p:nvPr>
-        </p:nvSpPr>
-        <p:spPr/>
-        <p:txBody>
-          <a:bodyPr/>
-          <a:lstStyle/>
-          <a:p>
-            <a:r>
-              <a:rPr lang="en-US" dirty="0"/>
-              <a:t>EDA Techniques </a:t>
-            </a:r>
-          </a:p>
-        </p:txBody>
-      </p:sp>
-      <p:sp>
-        <p:nvSpPr>
-          <p:cNvPr id="3" name="Content Placeholder 2">
-            <a:extLst>
-              <a:ext uri="{FF2B5EF4-FFF2-40B4-BE49-F238E27FC236}">
-                <a16:creationId xmlns:a16="http://schemas.microsoft.com/office/drawing/2014/main" id="{B5BB12DE-FC0E-871E-5C12-C25B8A95D744}"/>
-              </a:ext>
-            </a:extLst>
-          </p:cNvPr>
-          <p:cNvSpPr>
-            <a:spLocks noGrp="1"/>
-          </p:cNvSpPr>
-          <p:nvPr>
-            <p:ph idx="1"/>
-          </p:nvPr>
-        </p:nvSpPr>
-        <p:spPr/>
-        <p:txBody>
-          <a:bodyPr anchor="t">
-            <a:normAutofit/>
-          </a:bodyPr>
-          <a:lstStyle/>
-          <a:p>
-            <a:r>
-              <a:rPr lang="en-US" sz="2400" dirty="0"/>
-              <a:t>Distributions (quantitative variables)</a:t>
-            </a:r>
-          </a:p>
-        </p:txBody>
-      </p:sp>
-      <p:pic>
-        <p:nvPicPr>
-          <p:cNvPr id="6" name="Picture 5" descr="A graph of a number of numbers&#10;&#10;AI-generated content may be incorrect.">
-            <a:extLst>
-              <a:ext uri="{FF2B5EF4-FFF2-40B4-BE49-F238E27FC236}">
-                <a16:creationId xmlns:a16="http://schemas.microsoft.com/office/drawing/2014/main" id="{89C7B987-2C52-91F6-FA52-A9004B4BAC64}"/>
-              </a:ext>
-            </a:extLst>
-          </p:cNvPr>
-          <p:cNvPicPr>
-            <a:picLocks noChangeAspect="1"/>
-          </p:cNvPicPr>
-          <p:nvPr/>
-        </p:nvPicPr>
-        <p:blipFill>
-          <a:blip r:embed="rId3"/>
-          <a:stretch>
-            <a:fillRect/>
-          </a:stretch>
-        </p:blipFill>
-        <p:spPr>
-          <a:xfrm>
-            <a:off x="581192" y="2884370"/>
-            <a:ext cx="3507453" cy="3678303"/>
-          </a:xfrm>
-          <a:prstGeom prst="rect">
-            <a:avLst/>
-          </a:prstGeom>
-        </p:spPr>
-      </p:pic>
-      <p:pic>
-        <p:nvPicPr>
-          <p:cNvPr id="10" name="Picture 9" descr="A graph with numbers and a graph&#10;&#10;AI-generated content may be incorrect.">
-            <a:extLst>
-              <a:ext uri="{FF2B5EF4-FFF2-40B4-BE49-F238E27FC236}">
-                <a16:creationId xmlns:a16="http://schemas.microsoft.com/office/drawing/2014/main" id="{DE4E35FF-B14A-D33E-20A6-D8A52F1B827C}"/>
-              </a:ext>
-            </a:extLst>
-          </p:cNvPr>
-          <p:cNvPicPr>
-            <a:picLocks noChangeAspect="1"/>
-          </p:cNvPicPr>
-          <p:nvPr/>
-        </p:nvPicPr>
-        <p:blipFill>
-          <a:blip r:embed="rId4"/>
-          <a:stretch>
-            <a:fillRect/>
-          </a:stretch>
-        </p:blipFill>
-        <p:spPr>
-          <a:xfrm>
-            <a:off x="4269388" y="2884369"/>
-            <a:ext cx="3507453" cy="3678303"/>
-          </a:xfrm>
-          <a:prstGeom prst="rect">
-            <a:avLst/>
-          </a:prstGeom>
-        </p:spPr>
-      </p:pic>
-      <p:pic>
-        <p:nvPicPr>
-          <p:cNvPr id="12" name="Picture 11" descr="Graph of a graph with numbers and text&#10;&#10;AI-generated content may be incorrect.">
-            <a:extLst>
-              <a:ext uri="{FF2B5EF4-FFF2-40B4-BE49-F238E27FC236}">
-                <a16:creationId xmlns:a16="http://schemas.microsoft.com/office/drawing/2014/main" id="{917530C9-C7D8-51CD-9635-0AA11E1ED704}"/>
-              </a:ext>
-            </a:extLst>
-          </p:cNvPr>
-          <p:cNvPicPr>
-            <a:picLocks noChangeAspect="1"/>
-          </p:cNvPicPr>
-          <p:nvPr/>
-        </p:nvPicPr>
-        <p:blipFill>
-          <a:blip r:embed="rId5"/>
-          <a:stretch>
-            <a:fillRect/>
-          </a:stretch>
-        </p:blipFill>
-        <p:spPr>
-          <a:xfrm>
-            <a:off x="7940097" y="2884368"/>
-            <a:ext cx="3507453" cy="3678303"/>
-          </a:xfrm>
-          <a:prstGeom prst="rect">
-            <a:avLst/>
-          </a:prstGeom>
-        </p:spPr>
-      </p:pic>
-    </p:spTree>
-    <p:extLst>
-      <p:ext uri="{BB962C8B-B14F-4D97-AF65-F5344CB8AC3E}">
-        <p14:creationId xmlns:p14="http://schemas.microsoft.com/office/powerpoint/2010/main" val="2169788912"/>
       </p:ext>
     </p:extLst>
   </p:cSld>
